--- a/ESLAB_Final.pptx
+++ b/ESLAB_Final.pptx
@@ -5,7 +5,7 @@
     <p:sldMasterId id="2147483648" r:id="rId1"/>
   </p:sldMasterIdLst>
   <p:notesMasterIdLst>
-    <p:notesMasterId r:id="rId9"/>
+    <p:notesMasterId r:id="rId11"/>
   </p:notesMasterIdLst>
   <p:sldIdLst>
     <p:sldId id="256" r:id="rId2"/>
@@ -14,14 +14,16 @@
     <p:sldId id="257" r:id="rId5"/>
     <p:sldId id="261" r:id="rId6"/>
     <p:sldId id="258" r:id="rId7"/>
-    <p:sldId id="259" r:id="rId8"/>
+    <p:sldId id="265" r:id="rId8"/>
+    <p:sldId id="264" r:id="rId9"/>
+    <p:sldId id="259" r:id="rId10"/>
   </p:sldIdLst>
   <p:sldSz cx="12192000" cy="6858000"/>
   <p:notesSz cx="6858000" cy="12192000"/>
   <p:embeddedFontLst>
     <p:embeddedFont>
       <p:font typeface="Crimson Text Bold" panose="02020500000000000000" charset="0"/>
-      <p:regular r:id="rId10"/>
+      <p:regular r:id="rId12"/>
     </p:embeddedFont>
   </p:embeddedFontLst>
   <p:defaultTextStyle>
@@ -566,7 +568,7 @@
           <a:p>
             <a:fld id="{F7021451-1387-4CA6-816F-3879F97B5CBC}" type="slidenum">
               <a:rPr lang="en-US"/>
-              <a:t>7</a:t>
+              <a:t>9</a:t>
             </a:fld>
             <a:endParaRPr lang="en-US"/>
           </a:p>
@@ -3177,6 +3179,272 @@
 </file>
 
 <file path=ppt/slides/slide7.xml><?xml version="1.0" encoding="utf-8"?>
+<p:sld xmlns:a="http://schemas.openxmlformats.org/drawingml/2006/main" xmlns:r="http://schemas.openxmlformats.org/officeDocument/2006/relationships" xmlns:p="http://schemas.openxmlformats.org/presentationml/2006/main">
+  <p:cSld>
+    <p:spTree>
+      <p:nvGrpSpPr>
+        <p:cNvPr id="1" name="">
+          <a:extLst>
+            <a:ext uri="{FF2B5EF4-FFF2-40B4-BE49-F238E27FC236}">
+              <a16:creationId xmlns:a16="http://schemas.microsoft.com/office/drawing/2014/main" id="{EA2A852C-AC77-C55B-3AEC-B2B7AAE85D51}"/>
+            </a:ext>
+          </a:extLst>
+        </p:cNvPr>
+        <p:cNvGrpSpPr/>
+        <p:nvPr/>
+      </p:nvGrpSpPr>
+      <p:grpSpPr>
+        <a:xfrm>
+          <a:off x="0" y="0"/>
+          <a:ext cx="0" cy="0"/>
+          <a:chOff x="0" y="0"/>
+          <a:chExt cx="0" cy="0"/>
+        </a:xfrm>
+      </p:grpSpPr>
+      <p:sp>
+        <p:nvSpPr>
+          <p:cNvPr id="3" name="文字方塊 2">
+            <a:extLst>
+              <a:ext uri="{FF2B5EF4-FFF2-40B4-BE49-F238E27FC236}">
+                <a16:creationId xmlns:a16="http://schemas.microsoft.com/office/drawing/2014/main" id="{6BDDE901-FACA-233F-B23A-89AEC554BB8F}"/>
+              </a:ext>
+            </a:extLst>
+          </p:cNvPr>
+          <p:cNvSpPr txBox="1"/>
+          <p:nvPr/>
+        </p:nvSpPr>
+        <p:spPr>
+          <a:xfrm>
+            <a:off x="2252940" y="2591609"/>
+            <a:ext cx="7686120" cy="2585323"/>
+          </a:xfrm>
+          <a:prstGeom prst="rect">
+            <a:avLst/>
+          </a:prstGeom>
+          <a:noFill/>
+        </p:spPr>
+        <p:txBody>
+          <a:bodyPr wrap="square">
+            <a:spAutoFit/>
+          </a:bodyPr>
+          <a:lstStyle/>
+          <a:p>
+            <a:r>
+              <a:rPr lang="zh-TW" altLang="zh-TW" dirty="0"/>
+              <a:t>STMicroelectronics — </a:t>
+            </a:r>
+            <a:r>
+              <a:rPr lang="zh-TW" altLang="zh-TW" i="1" dirty="0"/>
+              <a:t>B-L475E-IOT01A Discovery kit (STM32L475)</a:t>
+            </a:r>
+            <a:r>
+              <a:rPr lang="zh-TW" altLang="zh-TW" dirty="0"/>
+              <a:t>.</a:t>
+            </a:r>
+            <a:endParaRPr lang="en-US" altLang="zh-TW" dirty="0"/>
+          </a:p>
+          <a:p>
+            <a:r>
+              <a:rPr lang="zh-TW" altLang="zh-TW" dirty="0"/>
+              <a:t> </a:t>
+            </a:r>
+            <a:r>
+              <a:rPr lang="zh-TW" altLang="zh-TW" u="sng" dirty="0">
+                <a:hlinkClick r:id="rId2"/>
+              </a:rPr>
+              <a:t>https://www.st.com/en/evaluation-tools/b-l475e-iot01a.html</a:t>
+            </a:r>
+            <a:endParaRPr lang="zh-TW" altLang="zh-TW" dirty="0"/>
+          </a:p>
+          <a:p>
+            <a:r>
+              <a:rPr lang="zh-TW" altLang="zh-TW" dirty="0"/>
+              <a:t>FreeRTOS / CMSIS-RTOS v2. </a:t>
+            </a:r>
+            <a:r>
+              <a:rPr lang="zh-TW" altLang="zh-TW" u="sng" dirty="0">
+                <a:hlinkClick r:id="rId3"/>
+              </a:rPr>
+              <a:t>https://www.freertos.org/</a:t>
+            </a:r>
+            <a:endParaRPr lang="en-US" altLang="zh-TW" dirty="0"/>
+          </a:p>
+          <a:p>
+            <a:r>
+              <a:rPr lang="zh-TW" altLang="zh-TW" dirty="0"/>
+              <a:t>LINE — </a:t>
+            </a:r>
+            <a:r>
+              <a:rPr lang="zh-TW" altLang="zh-TW" i="1" dirty="0"/>
+              <a:t>Messaging API</a:t>
+            </a:r>
+            <a:r>
+              <a:rPr lang="zh-TW" altLang="zh-TW" dirty="0"/>
+              <a:t>. </a:t>
+            </a:r>
+            <a:r>
+              <a:rPr lang="zh-TW" altLang="zh-TW" u="sng" dirty="0">
+                <a:hlinkClick r:id="rId4"/>
+              </a:rPr>
+              <a:t>https://developers.line.biz/en/docs/messaging-api/</a:t>
+            </a:r>
+            <a:endParaRPr lang="zh-TW" altLang="zh-TW" dirty="0"/>
+          </a:p>
+          <a:p>
+            <a:r>
+              <a:rPr lang="zh-TW" altLang="zh-TW" dirty="0"/>
+              <a:t>fast-alpr — </a:t>
+            </a:r>
+            <a:r>
+              <a:rPr lang="zh-TW" altLang="zh-TW" i="1" dirty="0"/>
+              <a:t>ONNX 車牌偵測 + OCR 套件</a:t>
+            </a:r>
+            <a:r>
+              <a:rPr lang="zh-TW" altLang="zh-TW" dirty="0"/>
+              <a:t>. </a:t>
+            </a:r>
+            <a:r>
+              <a:rPr lang="zh-TW" altLang="zh-TW" u="sng" dirty="0">
+                <a:hlinkClick r:id="rId5"/>
+              </a:rPr>
+              <a:t>https://pypi.org/project/fast-alpr/</a:t>
+            </a:r>
+            <a:endParaRPr lang="zh-TW" altLang="zh-TW" dirty="0"/>
+          </a:p>
+          <a:p>
+            <a:r>
+              <a:rPr lang="zh-TW" altLang="zh-TW" dirty="0"/>
+              <a:t>ONNX Runtime. </a:t>
+            </a:r>
+            <a:r>
+              <a:rPr lang="zh-TW" altLang="zh-TW" u="sng" dirty="0">
+                <a:hlinkClick r:id="rId6"/>
+              </a:rPr>
+              <a:t>https://onnxruntime.ai/</a:t>
+            </a:r>
+            <a:endParaRPr lang="zh-TW" altLang="zh-TW" dirty="0"/>
+          </a:p>
+          <a:p>
+            <a:r>
+              <a:rPr lang="zh-TW" altLang="zh-TW" dirty="0"/>
+              <a:t>OpenCV. </a:t>
+            </a:r>
+            <a:r>
+              <a:rPr lang="zh-TW" altLang="zh-TW" u="sng" dirty="0">
+                <a:hlinkClick r:id="rId7"/>
+              </a:rPr>
+              <a:t>https://opencv.org/</a:t>
+            </a:r>
+            <a:endParaRPr lang="zh-TW" altLang="zh-TW" dirty="0"/>
+          </a:p>
+          <a:p>
+            <a:r>
+              <a:rPr lang="zh-TW" altLang="zh-TW" dirty="0"/>
+              <a:t>Flask. </a:t>
+            </a:r>
+            <a:r>
+              <a:rPr lang="zh-TW" altLang="zh-TW" u="sng" dirty="0">
+                <a:hlinkClick r:id="rId8"/>
+              </a:rPr>
+              <a:t>https://flask.palletsprojects.com/</a:t>
+            </a:r>
+            <a:endParaRPr lang="zh-TW" altLang="zh-TW" dirty="0"/>
+          </a:p>
+          <a:p>
+            <a:r>
+              <a:rPr lang="zh-TW" altLang="zh-TW" dirty="0"/>
+              <a:t>ngrok. </a:t>
+            </a:r>
+            <a:r>
+              <a:rPr lang="zh-TW" altLang="zh-TW" u="sng" dirty="0">
+                <a:hlinkClick r:id="rId9"/>
+              </a:rPr>
+              <a:t>https://ngrok.com/</a:t>
+            </a:r>
+            <a:endParaRPr lang="zh-TW" altLang="zh-TW" dirty="0"/>
+          </a:p>
+        </p:txBody>
+      </p:sp>
+      <p:sp>
+        <p:nvSpPr>
+          <p:cNvPr id="4" name="文字方塊 3">
+            <a:extLst>
+              <a:ext uri="{FF2B5EF4-FFF2-40B4-BE49-F238E27FC236}">
+                <a16:creationId xmlns:a16="http://schemas.microsoft.com/office/drawing/2014/main" id="{50FF70A8-A37C-EF16-36A0-1DB4DB2C2618}"/>
+              </a:ext>
+            </a:extLst>
+          </p:cNvPr>
+          <p:cNvSpPr txBox="1"/>
+          <p:nvPr/>
+        </p:nvSpPr>
+        <p:spPr>
+          <a:xfrm>
+            <a:off x="3810542" y="421318"/>
+            <a:ext cx="4570916" cy="830997"/>
+          </a:xfrm>
+          <a:prstGeom prst="rect">
+            <a:avLst/>
+          </a:prstGeom>
+          <a:noFill/>
+        </p:spPr>
+        <p:txBody>
+          <a:bodyPr wrap="square" rtlCol="0">
+            <a:spAutoFit/>
+          </a:bodyPr>
+          <a:lstStyle/>
+          <a:p>
+            <a:pPr algn="ctr"/>
+            <a:r>
+              <a:rPr lang="zh-TW" altLang="en-US" sz="4800" dirty="0"/>
+              <a:t>參考資料</a:t>
+            </a:r>
+          </a:p>
+        </p:txBody>
+      </p:sp>
+    </p:spTree>
+    <p:extLst>
+      <p:ext uri="{BB962C8B-B14F-4D97-AF65-F5344CB8AC3E}">
+        <p14:creationId xmlns:p14="http://schemas.microsoft.com/office/powerpoint/2010/main" val="342561394"/>
+      </p:ext>
+    </p:extLst>
+  </p:cSld>
+  <p:clrMapOvr>
+    <a:masterClrMapping/>
+  </p:clrMapOvr>
+</p:sld>
+</file>
+
+<file path=ppt/slides/slide8.xml><?xml version="1.0" encoding="utf-8"?>
+<p:sld xmlns:a="http://schemas.openxmlformats.org/drawingml/2006/main" xmlns:r="http://schemas.openxmlformats.org/officeDocument/2006/relationships" xmlns:p="http://schemas.openxmlformats.org/presentationml/2006/main">
+  <p:cSld>
+    <p:spTree>
+      <p:nvGrpSpPr>
+        <p:cNvPr id="1" name=""/>
+        <p:cNvGrpSpPr/>
+        <p:nvPr/>
+      </p:nvGrpSpPr>
+      <p:grpSpPr>
+        <a:xfrm>
+          <a:off x="0" y="0"/>
+          <a:ext cx="0" cy="0"/>
+          <a:chOff x="0" y="0"/>
+          <a:chExt cx="0" cy="0"/>
+        </a:xfrm>
+      </p:grpSpPr>
+    </p:spTree>
+    <p:extLst>
+      <p:ext uri="{BB962C8B-B14F-4D97-AF65-F5344CB8AC3E}">
+        <p14:creationId xmlns:p14="http://schemas.microsoft.com/office/powerpoint/2010/main" val="88830108"/>
+      </p:ext>
+    </p:extLst>
+  </p:cSld>
+  <p:clrMapOvr>
+    <a:masterClrMapping/>
+  </p:clrMapOvr>
+</p:sld>
+</file>
+
+<file path=ppt/slides/slide9.xml><?xml version="1.0" encoding="utf-8"?>
 <p:sld xmlns:a="http://schemas.openxmlformats.org/drawingml/2006/main" xmlns:r="http://schemas.openxmlformats.org/officeDocument/2006/relationships" xmlns:p="http://schemas.openxmlformats.org/presentationml/2006/main">
   <p:cSld name="Slide 4">
     <p:spTree>

--- a/ESLAB_Final.pptx
+++ b/ESLAB_Final.pptx
@@ -5,7 +5,7 @@
     <p:sldMasterId id="2147483648" r:id="rId1"/>
   </p:sldMasterIdLst>
   <p:notesMasterIdLst>
-    <p:notesMasterId r:id="rId11"/>
+    <p:notesMasterId r:id="rId10"/>
   </p:notesMasterIdLst>
   <p:sldIdLst>
     <p:sldId id="256" r:id="rId2"/>
@@ -15,15 +15,14 @@
     <p:sldId id="261" r:id="rId6"/>
     <p:sldId id="258" r:id="rId7"/>
     <p:sldId id="265" r:id="rId8"/>
-    <p:sldId id="264" r:id="rId9"/>
-    <p:sldId id="259" r:id="rId10"/>
+    <p:sldId id="259" r:id="rId9"/>
   </p:sldIdLst>
   <p:sldSz cx="12192000" cy="6858000"/>
   <p:notesSz cx="6858000" cy="12192000"/>
   <p:embeddedFontLst>
     <p:embeddedFont>
       <p:font typeface="Crimson Text Bold" panose="02020500000000000000" charset="0"/>
-      <p:regular r:id="rId12"/>
+      <p:regular r:id="rId11"/>
     </p:embeddedFont>
   </p:embeddedFontLst>
   <p:defaultTextStyle>
@@ -568,7 +567,7 @@
           <a:p>
             <a:fld id="{F7021451-1387-4CA6-816F-3879F97B5CBC}" type="slidenum">
               <a:rPr lang="en-US"/>
-              <a:t>9</a:t>
+              <a:t>8</a:t>
             </a:fld>
             <a:endParaRPr lang="en-US"/>
           </a:p>
@@ -3415,36 +3414,6 @@
 </file>
 
 <file path=ppt/slides/slide8.xml><?xml version="1.0" encoding="utf-8"?>
-<p:sld xmlns:a="http://schemas.openxmlformats.org/drawingml/2006/main" xmlns:r="http://schemas.openxmlformats.org/officeDocument/2006/relationships" xmlns:p="http://schemas.openxmlformats.org/presentationml/2006/main">
-  <p:cSld>
-    <p:spTree>
-      <p:nvGrpSpPr>
-        <p:cNvPr id="1" name=""/>
-        <p:cNvGrpSpPr/>
-        <p:nvPr/>
-      </p:nvGrpSpPr>
-      <p:grpSpPr>
-        <a:xfrm>
-          <a:off x="0" y="0"/>
-          <a:ext cx="0" cy="0"/>
-          <a:chOff x="0" y="0"/>
-          <a:chExt cx="0" cy="0"/>
-        </a:xfrm>
-      </p:grpSpPr>
-    </p:spTree>
-    <p:extLst>
-      <p:ext uri="{BB962C8B-B14F-4D97-AF65-F5344CB8AC3E}">
-        <p14:creationId xmlns:p14="http://schemas.microsoft.com/office/powerpoint/2010/main" val="88830108"/>
-      </p:ext>
-    </p:extLst>
-  </p:cSld>
-  <p:clrMapOvr>
-    <a:masterClrMapping/>
-  </p:clrMapOvr>
-</p:sld>
-</file>
-
-<file path=ppt/slides/slide9.xml><?xml version="1.0" encoding="utf-8"?>
 <p:sld xmlns:a="http://schemas.openxmlformats.org/drawingml/2006/main" xmlns:r="http://schemas.openxmlformats.org/officeDocument/2006/relationships" xmlns:p="http://schemas.openxmlformats.org/presentationml/2006/main">
   <p:cSld name="Slide 4">
     <p:spTree>

--- a/ESLAB_Final.pptx
+++ b/ESLAB_Final.pptx
@@ -1138,14 +1138,13 @@
           <a:bodyPr wrap="square" lIns="0" tIns="0" rIns="0" bIns="0" rtlCol="0" anchor="t"/>
           <a:lstStyle/>
           <a:p>
-            <a:pPr marL="0" indent="0" algn="ctr">
+            <a:pPr algn="ctr">
               <a:lnSpc>
                 <a:spcPct val="133000"/>
               </a:lnSpc>
               <a:spcAft>
                 <a:spcPts val="1650"/>
               </a:spcAft>
-              <a:buNone/>
             </a:pPr>
             <a:r>
               <a:rPr lang="en-US" sz="1450" u="sng" dirty="0">
@@ -1155,27 +1154,27 @@
                 <a:latin typeface="Times New Roman" panose="02020603050405020304" pitchFamily="18" charset="0"/>
                 <a:ea typeface="Crimson Text" pitchFamily="34" charset="-122"/>
                 <a:cs typeface="Times New Roman" panose="02020603050405020304" pitchFamily="18" charset="0"/>
-                <a:hlinkClick r:id="rId4">
-                  <a:extLst>
-                    <a:ext uri="{A12FA001-AC4F-418D-AE19-62706E023703}">
-                      <ahyp:hlinkClr xmlns:ahyp="http://schemas.microsoft.com/office/drawing/2018/hyperlinkcolor" val="tx"/>
-                    </a:ext>
-                  </a:extLst>
-                </a:hlinkClick>
+                <a:hlinkClick r:id="rId4"/>
               </a:rPr>
-              <a:t>https://github.com/mikeee0910/Smart-Doorbell-and-RFID-Access-Control-System</a:t>
-            </a:r>
-            <a:endParaRPr lang="en-US" sz="1450" dirty="0">
+              <a:t>https://github.com/mikeee0910/Smart-Parking-Access-Control-System.git</a:t>
+            </a:r>
+            <a:endParaRPr lang="en-US" sz="1450" u="sng" dirty="0">
+              <a:solidFill>
+                <a:srgbClr val="118ACD"/>
+              </a:solidFill>
               <a:latin typeface="Times New Roman" panose="02020603050405020304" pitchFamily="18" charset="0"/>
+              <a:ea typeface="Crimson Text" pitchFamily="34" charset="-122"/>
               <a:cs typeface="Times New Roman" panose="02020603050405020304" pitchFamily="18" charset="0"/>
             </a:endParaRPr>
           </a:p>
           <a:p>
-            <a:pPr marL="0" indent="0" algn="ctr">
+            <a:pPr algn="ctr">
               <a:lnSpc>
                 <a:spcPct val="133000"/>
               </a:lnSpc>
-              <a:buNone/>
+              <a:spcAft>
+                <a:spcPts val="1650"/>
+              </a:spcAft>
             </a:pPr>
             <a:r>
               <a:rPr lang="zh-CN" altLang="en-US" sz="1450" dirty="0">
@@ -3579,45 +3578,55 @@
           <a:bodyPr wrap="square" lIns="0" tIns="0" rIns="0" bIns="0" rtlCol="0" anchor="t"/>
           <a:lstStyle/>
           <a:p>
-            <a:pPr marL="0" indent="0" algn="ctr">
+            <a:pPr algn="ctr">
               <a:lnSpc>
                 <a:spcPct val="133000"/>
               </a:lnSpc>
               <a:spcAft>
                 <a:spcPts val="1650"/>
               </a:spcAft>
-              <a:buNone/>
             </a:pPr>
             <a:r>
-              <a:rPr lang="en-US" sz="1450" u="sng" dirty="0">
+              <a:rPr lang="en-US" sz="1450" u="sng">
                 <a:solidFill>
                   <a:srgbClr val="118ACD"/>
                 </a:solidFill>
                 <a:latin typeface="Times New Roman" panose="02020603050405020304" pitchFamily="18" charset="0"/>
                 <a:ea typeface="Crimson Text" pitchFamily="34" charset="-122"/>
                 <a:cs typeface="Times New Roman" panose="02020603050405020304" pitchFamily="18" charset="0"/>
-                <a:hlinkClick r:id="rId4">
-                  <a:extLst>
-                    <a:ext uri="{A12FA001-AC4F-418D-AE19-62706E023703}">
-                      <ahyp:hlinkClr xmlns:ahyp="http://schemas.microsoft.com/office/drawing/2018/hyperlinkcolor" val="tx"/>
-                    </a:ext>
-                  </a:extLst>
-                </a:hlinkClick>
+                <a:hlinkClick r:id="rId4"/>
               </a:rPr>
-              <a:t>https://github.com/mikeee0910/Smart-Doorbell-and-RFID-Access-Control-System</a:t>
-            </a:r>
-            <a:endParaRPr lang="en-US" sz="1450" dirty="0">
+              <a:t>https://github.com/mikeee0910/Smart-Parking-Access-Control-System.git</a:t>
+            </a:r>
+            <a:endParaRPr lang="en-US" sz="1450" u="sng">
+              <a:solidFill>
+                <a:srgbClr val="118ACD"/>
+              </a:solidFill>
               <a:latin typeface="Times New Roman" panose="02020603050405020304" pitchFamily="18" charset="0"/>
+              <a:ea typeface="Crimson Text" pitchFamily="34" charset="-122"/>
               <a:cs typeface="Times New Roman" panose="02020603050405020304" pitchFamily="18" charset="0"/>
             </a:endParaRPr>
           </a:p>
           <a:p>
-            <a:pPr marL="0" indent="0" algn="ctr">
+            <a:pPr algn="ctr">
               <a:lnSpc>
                 <a:spcPct val="133000"/>
               </a:lnSpc>
-              <a:buNone/>
+              <a:spcAft>
+                <a:spcPts val="1650"/>
+              </a:spcAft>
             </a:pPr>
+            <a:r>
+              <a:rPr lang="zh-CN" altLang="en-US" sz="1450">
+                <a:solidFill>
+                  <a:srgbClr val="000000"/>
+                </a:solidFill>
+                <a:latin typeface="Times New Roman" panose="02020603050405020304" pitchFamily="18" charset="0"/>
+                <a:ea typeface="Crimson Text" pitchFamily="34" charset="-122"/>
+                <a:cs typeface="Times New Roman" panose="02020603050405020304" pitchFamily="18" charset="0"/>
+              </a:rPr>
+              <a:t>R</a:t>
+            </a:r>
             <a:r>
               <a:rPr lang="zh-CN" altLang="en-US" sz="1450" dirty="0">
                 <a:solidFill>
@@ -3627,7 +3636,7 @@
                 <a:ea typeface="Crimson Text" pitchFamily="34" charset="-122"/>
                 <a:cs typeface="Times New Roman" panose="02020603050405020304" pitchFamily="18" charset="0"/>
               </a:rPr>
-              <a:t>R13921015 潘思翰　　R13921071 孟繁宇</a:t>
+              <a:t>13921015 潘思翰　　R13921071 孟繁宇</a:t>
             </a:r>
             <a:endParaRPr lang="en-US" sz="1450" dirty="0">
               <a:latin typeface="Times New Roman" panose="02020603050405020304" pitchFamily="18" charset="0"/>
